--- a/curso/pptx/S84.pptx
+++ b/curso/pptx/S84.pptx
@@ -5233,7 +5233,7 @@
                 </a:solidFill>
                 <a:latin typeface="Nunito Sans"/>
               </a:rPr>
-              <a:t>Aceptar cualquier cosa porque «es su cultura»</a:t>
+              <a:t>因为“这是他们的文化”就接受任何事</a:t>
             </a:r>
           </a:p>
           <a:p>
@@ -5258,7 +5258,7 @@
                 </a:solidFill>
                 <a:latin typeface="Nunito Sans"/>
               </a:rPr>
-              <a:t>Pensar que todos los de un país son iguales</a:t>
+              <a:t>认为一个国家的所有人都一样</a:t>
             </a:r>
           </a:p>
           <a:p>
@@ -5283,7 +5283,7 @@
                 </a:solidFill>
                 <a:latin typeface="Nunito Sans"/>
               </a:rPr>
-              <a:t>Llamar «raro» a lo que no conozco</a:t>
+              <a:t>把我不了解的东西叫作“奇怪”</a:t>
             </a:r>
           </a:p>
         </p:txBody>
@@ -5413,7 +5413,7 @@
                 </a:solidFill>
                 <a:latin typeface="Nunito Sans"/>
               </a:rPr>
-              <a:t>Intentar entender antes de juzgar</a:t>
+              <a:t>先努力理解，再下判断</a:t>
             </a:r>
           </a:p>
           <a:p>
@@ -5438,7 +5438,7 @@
                 </a:solidFill>
                 <a:latin typeface="Nunito Sans"/>
               </a:rPr>
-              <a:t>Ver a cada persona, no solo su origen</a:t>
+              <a:t>看到每一个人，而不只是他的出身</a:t>
             </a:r>
           </a:p>
           <a:p>
@@ -5463,7 +5463,7 @@
                 </a:solidFill>
                 <a:latin typeface="Nunito Sans"/>
               </a:rPr>
-              <a:t>Criticar con razones lo que daña a alguien</a:t>
+              <a:t>带着理由批评伤害别人的东西</a:t>
             </a:r>
           </a:p>
         </p:txBody>
@@ -7248,7 +7248,7 @@
                 </a:solidFill>
                 <a:latin typeface="Nunito Sans"/>
               </a:rPr>
-              <a:t>Se </a:t>
+              <a:t>它是</a:t>
             </a:r>
             <a:r>
               <a:rPr sz="2800" b="1">
@@ -7257,7 +7257,7 @@
                 </a:solidFill>
                 <a:latin typeface="Nunito Sans"/>
               </a:rPr>
-              <a:t>aprende</a:t>
+              <a:t>学来的</a:t>
             </a:r>
             <a:r>
               <a:rPr sz="2800" b="0">
@@ -7266,7 +7266,7 @@
                 </a:solidFill>
                 <a:latin typeface="Nunito Sans"/>
               </a:rPr>
-              <a:t>: no viene en los genes</a:t>
+              <a:t>：不是基因里带的</a:t>
             </a:r>
           </a:p>
           <a:p>
@@ -7291,7 +7291,7 @@
                 </a:solidFill>
                 <a:latin typeface="Nunito Sans"/>
               </a:rPr>
-              <a:t>Todos los grupos humanos tienen cultura</a:t>
+              <a:t>所有人类群体都有文化</a:t>
             </a:r>
           </a:p>
           <a:p>
@@ -7316,7 +7316,7 @@
                 </a:solidFill>
                 <a:latin typeface="Nunito Sans"/>
               </a:rPr>
-              <a:t>Hay muchas </a:t>
+              <a:t>有很多种</a:t>
             </a:r>
             <a:r>
               <a:rPr sz="2800" b="1">
@@ -7325,7 +7325,7 @@
                 </a:solidFill>
                 <a:latin typeface="Nunito Sans"/>
               </a:rPr>
-              <a:t>culturas</a:t>
+              <a:t>文化</a:t>
             </a:r>
             <a:r>
               <a:rPr sz="2800" b="0">
@@ -7334,7 +7334,7 @@
                 </a:solidFill>
                 <a:latin typeface="Nunito Sans"/>
               </a:rPr>
-              <a:t>, y cambian con el tiempo</a:t>
+              <a:t>，而且会随时间变化</a:t>
             </a:r>
           </a:p>
           <a:p>
@@ -7359,7 +7359,7 @@
                 </a:solidFill>
                 <a:latin typeface="Nunito Sans"/>
               </a:rPr>
-              <a:t>Una persona puede vivir en </a:t>
+              <a:t>一个人可以同时生活在</a:t>
             </a:r>
             <a:r>
               <a:rPr sz="2800" b="1">
@@ -7368,7 +7368,7 @@
                 </a:solidFill>
                 <a:latin typeface="Nunito Sans"/>
               </a:rPr>
-              <a:t>varias</a:t>
+              <a:t>多种</a:t>
             </a:r>
             <a:r>
               <a:rPr sz="2800" b="0">
@@ -7377,7 +7377,7 @@
                 </a:solidFill>
                 <a:latin typeface="Nunito Sans"/>
               </a:rPr>
-              <a:t> a la vez</a:t>
+              <a:t>文化中</a:t>
             </a:r>
           </a:p>
         </p:txBody>

--- a/curso/pptx/S84.pptx
+++ b/curso/pptx/S84.pptx
@@ -4129,7 +4129,7 @@
                 </a:solidFill>
                 <a:latin typeface="Nunito Sans"/>
               </a:rPr>
-              <a:t>Maialen 和家人去另一个国家旅行。那里的人下午六点吃晚饭。她爸爸评论说：“这些人真奇怪，这个点吃晚饭不正常。”</a:t>
+              <a:t>一个女孩和家人去另一个国家旅行。那里的人下午六点吃晚饭。她爸爸评论说：“这些人真奇怪，这个点吃晚饭不正常。”</a:t>
             </a:r>
           </a:p>
         </p:txBody>
@@ -4438,7 +4438,7 @@
                 </a:solidFill>
                 <a:latin typeface="Nunito Sans"/>
               </a:rPr>
-              <a:t>回到一开始的案例：在陈的家里进门要脱鞋；在 Iker 家里不用。哪一家做得对？</a:t>
+              <a:t>回到一开始的案例：在那个男孩的家里进门要脱鞋；在那个同学家里不用。哪一家做得对？</a:t>
             </a:r>
           </a:p>
         </p:txBody>
@@ -6871,7 +6871,7 @@
                 </a:solidFill>
                 <a:latin typeface="Nunito Sans"/>
               </a:rPr>
-              <a:t>在陈的家里，大家进门都脱鞋。在 Iker 家里，谁都不脱。第一次去陈家时，Iker 站在门口愣住了。</a:t>
+              <a:t>在一个男孩的家里，大家进门都脱鞋。在一个同学家里，谁都不脱。第一次去这个男孩家时，这个同学站在门口愣住了。</a:t>
             </a:r>
           </a:p>
         </p:txBody>
